--- a/10. IA Generativa e Modelos de Linguagem na Pesquisa Científica_Eder/Estudar e reproduzir um artigo científico com Claude Code_FIT796.pptx
+++ b/10. IA Generativa e Modelos de Linguagem na Pesquisa Científica_Eder/Estudar e reproduzir um artigo científico com Claude Code_FIT796.pptx
@@ -152,12 +152,41 @@
 </p:presentation>
 </file>
 
-<file path=ppt/revisionInfo.xml><?xml version="1.0" encoding="utf-8"?>
-<p1510:revInfo xmlns:a="http://schemas.openxmlformats.org/drawingml/2006/main" xmlns:r="http://schemas.openxmlformats.org/officeDocument/2006/relationships" xmlns:p1510="http://schemas.microsoft.com/office/powerpoint/2015/10/main">
-  <p1510:revLst>
-    <p1510:client id="{E45A2DEC-2261-48AF-B4A8-7B10B1CC645D}" v="1" dt="2026-10-27T15:45:50.880"/>
-  </p1510:revLst>
-</p1510:revInfo>
+<file path=ppt/changesInfos/changesInfo1.xml><?xml version="1.0" encoding="utf-8"?>
+<pc:chgInfo xmlns:a="http://schemas.openxmlformats.org/drawingml/2006/main" xmlns:r="http://schemas.openxmlformats.org/officeDocument/2006/relationships" xmlns:ac="http://schemas.microsoft.com/office/drawing/2013/main/command" xmlns:pc="http://schemas.microsoft.com/office/powerpoint/2013/main/command">
+  <pc:docChgLst>
+    <pc:chgData name="Eder Silva" userId="9b7f41b4-798d-40cf-8f87-8e33ae7a0417" providerId="ADAL" clId="{DFF9E84E-5922-4F26-9EAD-8AB4E668133E}"/>
+    <pc:docChg chg="modSld">
+      <pc:chgData name="Eder Silva" userId="9b7f41b4-798d-40cf-8f87-8e33ae7a0417" providerId="ADAL" clId="{DFF9E84E-5922-4F26-9EAD-8AB4E668133E}" dt="2026-10-30T20:28:35.287" v="4" actId="1076"/>
+      <pc:docMkLst>
+        <pc:docMk/>
+      </pc:docMkLst>
+      <pc:sldChg chg="modSp mod">
+        <pc:chgData name="Eder Silva" userId="9b7f41b4-798d-40cf-8f87-8e33ae7a0417" providerId="ADAL" clId="{DFF9E84E-5922-4F26-9EAD-8AB4E668133E}" dt="2026-10-30T20:28:35.287" v="4" actId="1076"/>
+        <pc:sldMkLst>
+          <pc:docMk/>
+          <pc:sldMk cId="233820237" sldId="351"/>
+        </pc:sldMkLst>
+        <pc:spChg chg="mod">
+          <ac:chgData name="Eder Silva" userId="9b7f41b4-798d-40cf-8f87-8e33ae7a0417" providerId="ADAL" clId="{DFF9E84E-5922-4F26-9EAD-8AB4E668133E}" dt="2026-10-30T20:28:28.326" v="2" actId="1076"/>
+          <ac:spMkLst>
+            <pc:docMk/>
+            <pc:sldMk cId="233820237" sldId="351"/>
+            <ac:spMk id="27" creationId="{1CF72A76-B4AB-0C1F-A545-3104038E03A0}"/>
+          </ac:spMkLst>
+        </pc:spChg>
+        <pc:picChg chg="mod">
+          <ac:chgData name="Eder Silva" userId="9b7f41b4-798d-40cf-8f87-8e33ae7a0417" providerId="ADAL" clId="{DFF9E84E-5922-4F26-9EAD-8AB4E668133E}" dt="2026-10-30T20:28:35.287" v="4" actId="1076"/>
+          <ac:picMkLst>
+            <pc:docMk/>
+            <pc:sldMk cId="233820237" sldId="351"/>
+            <ac:picMk id="26" creationId="{038E16B8-628B-FA7F-1B1E-86066007C9EB}"/>
+          </ac:picMkLst>
+        </pc:picChg>
+      </pc:sldChg>
+    </pc:docChg>
+  </pc:docChgLst>
+</pc:chgInfo>
 </file>
 
 <file path=ppt/notesMasters/notesMaster1.xml><?xml version="1.0" encoding="utf-8"?>
@@ -2948,7 +2977,7 @@
           <a:p>
             <a:fld id="{5BCAD085-E8A6-8845-BD4E-CB4CCA059FC4}" type="datetimeFigureOut">
               <a:rPr lang="en-US" smtClean="0"/>
-              <a:t>10/27/2026</a:t>
+              <a:t>10/30/2026</a:t>
             </a:fld>
             <a:endParaRPr lang="en-US"/>
           </a:p>
@@ -3116,7 +3145,7 @@
           <a:p>
             <a:fld id="{5BCAD085-E8A6-8845-BD4E-CB4CCA059FC4}" type="datetimeFigureOut">
               <a:rPr lang="en-US" smtClean="0"/>
-              <a:t>10/27/2026</a:t>
+              <a:t>10/30/2026</a:t>
             </a:fld>
             <a:endParaRPr lang="en-US"/>
           </a:p>
@@ -3294,7 +3323,7 @@
           <a:p>
             <a:fld id="{5BCAD085-E8A6-8845-BD4E-CB4CCA059FC4}" type="datetimeFigureOut">
               <a:rPr lang="en-US" smtClean="0"/>
-              <a:t>10/27/2026</a:t>
+              <a:t>10/30/2026</a:t>
             </a:fld>
             <a:endParaRPr lang="en-US"/>
           </a:p>
@@ -3462,7 +3491,7 @@
           <a:p>
             <a:fld id="{5BCAD085-E8A6-8845-BD4E-CB4CCA059FC4}" type="datetimeFigureOut">
               <a:rPr lang="en-US" smtClean="0"/>
-              <a:t>10/27/2026</a:t>
+              <a:t>10/30/2026</a:t>
             </a:fld>
             <a:endParaRPr lang="en-US"/>
           </a:p>
@@ -3707,7 +3736,7 @@
           <a:p>
             <a:fld id="{5BCAD085-E8A6-8845-BD4E-CB4CCA059FC4}" type="datetimeFigureOut">
               <a:rPr lang="en-US" smtClean="0"/>
-              <a:t>10/27/2026</a:t>
+              <a:t>10/30/2026</a:t>
             </a:fld>
             <a:endParaRPr lang="en-US"/>
           </a:p>
@@ -3992,7 +4021,7 @@
           <a:p>
             <a:fld id="{5BCAD085-E8A6-8845-BD4E-CB4CCA059FC4}" type="datetimeFigureOut">
               <a:rPr lang="en-US" smtClean="0"/>
-              <a:t>10/27/2026</a:t>
+              <a:t>10/30/2026</a:t>
             </a:fld>
             <a:endParaRPr lang="en-US"/>
           </a:p>
@@ -4411,7 +4440,7 @@
           <a:p>
             <a:fld id="{5BCAD085-E8A6-8845-BD4E-CB4CCA059FC4}" type="datetimeFigureOut">
               <a:rPr lang="en-US" smtClean="0"/>
-              <a:t>10/27/2026</a:t>
+              <a:t>10/30/2026</a:t>
             </a:fld>
             <a:endParaRPr lang="en-US"/>
           </a:p>
@@ -4528,7 +4557,7 @@
           <a:p>
             <a:fld id="{5BCAD085-E8A6-8845-BD4E-CB4CCA059FC4}" type="datetimeFigureOut">
               <a:rPr lang="en-US" smtClean="0"/>
-              <a:t>10/27/2026</a:t>
+              <a:t>10/30/2026</a:t>
             </a:fld>
             <a:endParaRPr lang="en-US"/>
           </a:p>
@@ -4623,7 +4652,7 @@
           <a:p>
             <a:fld id="{5BCAD085-E8A6-8845-BD4E-CB4CCA059FC4}" type="datetimeFigureOut">
               <a:rPr lang="en-US" smtClean="0"/>
-              <a:t>10/27/2026</a:t>
+              <a:t>10/30/2026</a:t>
             </a:fld>
             <a:endParaRPr lang="en-US"/>
           </a:p>
@@ -4898,7 +4927,7 @@
           <a:p>
             <a:fld id="{5BCAD085-E8A6-8845-BD4E-CB4CCA059FC4}" type="datetimeFigureOut">
               <a:rPr lang="en-US" smtClean="0"/>
-              <a:t>10/27/2026</a:t>
+              <a:t>10/30/2026</a:t>
             </a:fld>
             <a:endParaRPr lang="en-US"/>
           </a:p>
@@ -5150,7 +5179,7 @@
           <a:p>
             <a:fld id="{5BCAD085-E8A6-8845-BD4E-CB4CCA059FC4}" type="datetimeFigureOut">
               <a:rPr lang="en-US" smtClean="0"/>
-              <a:t>10/27/2026</a:t>
+              <a:t>10/30/2026</a:t>
             </a:fld>
             <a:endParaRPr lang="en-US"/>
           </a:p>
@@ -5361,7 +5390,7 @@
           <a:p>
             <a:fld id="{5BCAD085-E8A6-8845-BD4E-CB4CCA059FC4}" type="datetimeFigureOut">
               <a:rPr lang="en-US" smtClean="0"/>
-              <a:t>10/27/2026</a:t>
+              <a:t>10/30/2026</a:t>
             </a:fld>
             <a:endParaRPr lang="en-US"/>
           </a:p>
@@ -9849,7 +9878,7 @@
         </p:nvGraphicFramePr>
         <p:xfrm>
           <a:off x="640080" y="1043813"/>
-          <a:ext cx="10909300" cy="1778000"/>
+          <a:ext cx="10909300" cy="2440432"/>
         </p:xfrm>
         <a:graphic>
           <a:graphicData uri="http://schemas.openxmlformats.org/drawingml/2006/table">
@@ -11134,7 +11163,7 @@
         </p:nvGraphicFramePr>
         <p:xfrm>
           <a:off x="640080" y="1043813"/>
-          <a:ext cx="10909300" cy="1016000"/>
+          <a:ext cx="10896600" cy="1258316"/>
         </p:xfrm>
         <a:graphic>
           <a:graphicData uri="http://schemas.openxmlformats.org/drawingml/2006/table">
@@ -12097,8 +12126,8 @@
         </p:blipFill>
         <p:spPr>
           <a:xfrm>
-            <a:off x="4939030" y="1043813"/>
-            <a:ext cx="2311400" cy="1651000"/>
+            <a:off x="3643630" y="1043812"/>
+            <a:ext cx="5513070" cy="3566287"/>
           </a:xfrm>
           <a:prstGeom prst="rect">
             <a:avLst/>
@@ -12119,7 +12148,7 @@
         </p:nvSpPr>
         <p:spPr>
           <a:xfrm>
-            <a:off x="640080" y="2847213"/>
+            <a:off x="640080" y="4523613"/>
             <a:ext cx="10909300" cy="2937764"/>
           </a:xfrm>
           <a:prstGeom prst="rect">
@@ -12149,15 +12178,12 @@
               <a:buFont typeface="+mj-lt"/>
               <a:buChar char="•"/>
             </a:pPr>
-            <a:r>
-              <a:rPr lang="pt-BR" sz="1600">
-                <a:solidFill>
-                  <a:srgbClr val="2E3A2F"/>
-                </a:solidFill>
-                <a:latin typeface="DejaVu Sans" panose="020B0603030804020204" pitchFamily="34" charset="0"/>
-              </a:rPr>
-              <a:t>Tabela que o modelo minimo deve imprimir:</a:t>
-            </a:r>
+            <a:endParaRPr lang="pt-BR" sz="1600" dirty="0">
+              <a:solidFill>
+                <a:srgbClr val="2E3A2F"/>
+              </a:solidFill>
+              <a:latin typeface="DejaVu Sans" panose="020B0603030804020204" pitchFamily="34" charset="0"/>
+            </a:endParaRPr>
           </a:p>
           <a:p>
             <a:pPr marL="254000" indent="-254000">
@@ -12176,12 +12202,24 @@
               <a:buFont typeface="+mj-lt"/>
               <a:buChar char="•"/>
             </a:pPr>
-            <a:endParaRPr lang="pt-BR" sz="1600">
-              <a:solidFill>
-                <a:srgbClr val="2E3A2F"/>
-              </a:solidFill>
-              <a:latin typeface="DejaVu Sans" panose="020B0603030804020204" pitchFamily="34" charset="0"/>
-            </a:endParaRPr>
+            <a:r>
+              <a:rPr lang="pt-BR" sz="1600" dirty="0" err="1">
+                <a:solidFill>
+                  <a:srgbClr val="2E3A2F"/>
+                </a:solidFill>
+                <a:latin typeface="DejaVu Sans" panose="020B0603030804020204" pitchFamily="34" charset="0"/>
+              </a:rPr>
+              <a:t>Padrao</a:t>
+            </a:r>
+            <a:r>
+              <a:rPr lang="pt-BR" sz="1600" dirty="0">
+                <a:solidFill>
+                  <a:srgbClr val="2E3A2F"/>
+                </a:solidFill>
+                <a:latin typeface="DejaVu Sans" panose="020B0603030804020204" pitchFamily="34" charset="0"/>
+              </a:rPr>
+              <a:t> esperado: r(LS) &lt; r(RR-BLUP) e b(LS) &lt;&lt; 1.</a:t>
+            </a:r>
           </a:p>
           <a:p>
             <a:pPr marL="254000" indent="-254000">
@@ -12201,147 +12239,51 @@
               <a:buChar char="•"/>
             </a:pPr>
             <a:r>
-              <a:rPr lang="pt-BR" sz="1600">
+              <a:rPr lang="pt-BR" sz="1600" dirty="0">
                 <a:solidFill>
                   <a:srgbClr val="2E3A2F"/>
                 </a:solidFill>
                 <a:latin typeface="DejaVu Sans" panose="020B0603030804020204" pitchFamily="34" charset="0"/>
               </a:rPr>
-              <a:t>  Metodo   r_modelo  b_modelo  r_artigo  b_artigo</a:t>
-            </a:r>
-          </a:p>
-          <a:p>
-            <a:pPr marL="254000" indent="-254000">
-              <a:lnSpc>
-                <a:spcPct val="92000"/>
-              </a:lnSpc>
-              <a:spcBef>
-                <a:spcPts val="600"/>
-              </a:spcBef>
-              <a:spcAft>
-                <a:spcPts val="600"/>
-              </a:spcAft>
-              <a:buClr>
-                <a:srgbClr val="F9A620"/>
-              </a:buClr>
-              <a:buFont typeface="+mj-lt"/>
-              <a:buChar char="•"/>
-            </a:pPr>
-            <a:r>
-              <a:rPr lang="pt-BR" sz="1600">
+              <a:t>Se </a:t>
+            </a:r>
+            <a:r>
+              <a:rPr lang="pt-BR" sz="1600" dirty="0" err="1">
                 <a:solidFill>
                   <a:srgbClr val="2E3A2F"/>
                 </a:solidFill>
                 <a:latin typeface="DejaVu Sans" panose="020B0603030804020204" pitchFamily="34" charset="0"/>
               </a:rPr>
-              <a:t>  LS       ???       ???       0,318     0,285</a:t>
-            </a:r>
-          </a:p>
-          <a:p>
-            <a:pPr marL="254000" indent="-254000">
-              <a:lnSpc>
-                <a:spcPct val="92000"/>
-              </a:lnSpc>
-              <a:spcBef>
-                <a:spcPts val="600"/>
-              </a:spcBef>
-              <a:spcAft>
-                <a:spcPts val="600"/>
-              </a:spcAft>
-              <a:buClr>
-                <a:srgbClr val="F9A620"/>
-              </a:buClr>
-              <a:buFont typeface="+mj-lt"/>
-              <a:buChar char="•"/>
-            </a:pPr>
-            <a:r>
-              <a:rPr lang="pt-BR" sz="1600">
+              <a:t>nao</a:t>
+            </a:r>
+            <a:r>
+              <a:rPr lang="pt-BR" sz="1600" dirty="0">
                 <a:solidFill>
                   <a:srgbClr val="2E3A2F"/>
                 </a:solidFill>
                 <a:latin typeface="DejaVu Sans" panose="020B0603030804020204" pitchFamily="34" charset="0"/>
               </a:rPr>
-              <a:t>  RR-BLUP  ???       ???       0,732     ---</a:t>
-            </a:r>
-          </a:p>
-          <a:p>
-            <a:pPr marL="254000" indent="-254000">
-              <a:lnSpc>
-                <a:spcPct val="92000"/>
-              </a:lnSpc>
-              <a:spcBef>
-                <a:spcPts val="600"/>
-              </a:spcBef>
-              <a:spcAft>
-                <a:spcPts val="600"/>
-              </a:spcAft>
-              <a:buClr>
-                <a:srgbClr val="F9A620"/>
-              </a:buClr>
-              <a:buFont typeface="+mj-lt"/>
-              <a:buChar char="•"/>
-            </a:pPr>
-            <a:endParaRPr lang="pt-BR" sz="1600">
-              <a:solidFill>
-                <a:srgbClr val="2E3A2F"/>
-              </a:solidFill>
-              <a:latin typeface="DejaVu Sans" panose="020B0603030804020204" pitchFamily="34" charset="0"/>
-            </a:endParaRPr>
-          </a:p>
-          <a:p>
-            <a:pPr marL="254000" indent="-254000">
-              <a:lnSpc>
-                <a:spcPct val="92000"/>
-              </a:lnSpc>
-              <a:spcBef>
-                <a:spcPts val="600"/>
-              </a:spcBef>
-              <a:spcAft>
-                <a:spcPts val="600"/>
-              </a:spcAft>
-              <a:buClr>
-                <a:srgbClr val="F9A620"/>
-              </a:buClr>
-              <a:buFont typeface="+mj-lt"/>
-              <a:buChar char="•"/>
-            </a:pPr>
-            <a:r>
-              <a:rPr lang="pt-BR" sz="1600">
+              <a:t>, ha erro no </a:t>
+            </a:r>
+            <a:r>
+              <a:rPr lang="pt-BR" sz="1600" dirty="0" err="1">
                 <a:solidFill>
                   <a:srgbClr val="2E3A2F"/>
                 </a:solidFill>
                 <a:latin typeface="DejaVu Sans" panose="020B0603030804020204" pitchFamily="34" charset="0"/>
               </a:rPr>
-              <a:t>Padrao esperado: r(LS) &lt; r(RR-BLUP) e b(LS) &lt;&lt; 1.</a:t>
-            </a:r>
-          </a:p>
-          <a:p>
-            <a:pPr marL="254000" indent="-254000">
-              <a:lnSpc>
-                <a:spcPct val="92000"/>
-              </a:lnSpc>
-              <a:spcBef>
-                <a:spcPts val="600"/>
-              </a:spcBef>
-              <a:spcAft>
-                <a:spcPts val="600"/>
-              </a:spcAft>
-              <a:buClr>
-                <a:srgbClr val="F9A620"/>
-              </a:buClr>
-              <a:buFont typeface="+mj-lt"/>
-              <a:buChar char="•"/>
-            </a:pPr>
-            <a:r>
-              <a:rPr lang="pt-BR" sz="1600">
+              <a:t>codigo</a:t>
+            </a:r>
+            <a:r>
+              <a:rPr lang="pt-BR" sz="1600" dirty="0">
                 <a:solidFill>
                   <a:srgbClr val="2E3A2F"/>
                 </a:solidFill>
                 <a:latin typeface="DejaVu Sans" panose="020B0603030804020204" pitchFamily="34" charset="0"/>
               </a:rPr>
-              <a:t>Se nao, ha erro no codigo.</a:t>
-            </a:r>
-            <a:endParaRPr lang="en-US" sz="1600">
+              <a:t>.</a:t>
+            </a:r>
+            <a:endParaRPr lang="en-US" sz="1600" dirty="0">
               <a:solidFill>
                 <a:srgbClr val="2E3A2F"/>
               </a:solidFill>
@@ -15352,7 +15294,7 @@
         </p:nvGraphicFramePr>
         <p:xfrm>
           <a:off x="640080" y="1043813"/>
-          <a:ext cx="10909300" cy="1016000"/>
+          <a:ext cx="10909300" cy="1496695"/>
         </p:xfrm>
         <a:graphic>
           <a:graphicData uri="http://schemas.openxmlformats.org/drawingml/2006/table">
